--- a/docs/why-rules-before-ai.pptx
+++ b/docs/why-rules-before-ai.pptx
@@ -3210,7 +3210,7 @@
     <p:bg>
       <p:bgPr>
         <a:solidFill>
-          <a:srgbClr val="FFFFFF"/>
+          <a:srgbClr val="F3F4F6"/>
         </a:solidFill>
         <a:effectLst/>
       </p:bgPr>
@@ -3614,7 +3614,7 @@
     <p:bg>
       <p:bgPr>
         <a:solidFill>
-          <a:srgbClr val="FFFFFF"/>
+          <a:srgbClr val="F3F4F6"/>
         </a:solidFill>
         <a:effectLst/>
       </p:bgPr>
@@ -4354,7 +4354,7 @@
     <p:bg>
       <p:bgPr>
         <a:solidFill>
-          <a:srgbClr val="FFFFFF"/>
+          <a:srgbClr val="F3F4F6"/>
         </a:solidFill>
         <a:effectLst/>
       </p:bgPr>
@@ -4695,7 +4695,7 @@
     <p:bg>
       <p:bgPr>
         <a:solidFill>
-          <a:srgbClr val="FFFFFF"/>
+          <a:srgbClr val="F3F4F6"/>
         </a:solidFill>
         <a:effectLst/>
       </p:bgPr>
@@ -5081,7 +5081,7 @@
     <p:bg>
       <p:bgPr>
         <a:solidFill>
-          <a:srgbClr val="FFFFFF"/>
+          <a:srgbClr val="F3F4F6"/>
         </a:solidFill>
         <a:effectLst/>
       </p:bgPr>
@@ -5516,7 +5516,7 @@
     <p:bg>
       <p:bgPr>
         <a:solidFill>
-          <a:srgbClr val="FFFFFF"/>
+          <a:srgbClr val="F3F4F6"/>
         </a:solidFill>
         <a:effectLst/>
       </p:bgPr>
@@ -5829,7 +5829,7 @@
     <p:bg>
       <p:bgPr>
         <a:solidFill>
-          <a:srgbClr val="FFFFFF"/>
+          <a:srgbClr val="F3F4F6"/>
         </a:solidFill>
         <a:effectLst/>
       </p:bgPr>
@@ -6284,7 +6284,7 @@
     <p:bg>
       <p:bgPr>
         <a:solidFill>
-          <a:srgbClr val="FFFFFF"/>
+          <a:srgbClr val="F3F4F6"/>
         </a:solidFill>
         <a:effectLst/>
       </p:bgPr>
@@ -6567,7 +6567,7 @@
     <p:bg>
       <p:bgPr>
         <a:solidFill>
-          <a:srgbClr val="FFFFFF"/>
+          <a:srgbClr val="F3F4F6"/>
         </a:solidFill>
         <a:effectLst/>
       </p:bgPr>
@@ -6892,7 +6892,7 @@
     <p:bg>
       <p:bgPr>
         <a:solidFill>
-          <a:srgbClr val="FFFFFF"/>
+          <a:srgbClr val="F3F4F6"/>
         </a:solidFill>
         <a:effectLst/>
       </p:bgPr>
@@ -7206,7 +7206,7 @@
     <p:bg>
       <p:bgPr>
         <a:solidFill>
-          <a:srgbClr val="FFFFFF"/>
+          <a:srgbClr val="F3F4F6"/>
         </a:solidFill>
         <a:effectLst/>
       </p:bgPr>
@@ -7628,7 +7628,7 @@
     <p:bg>
       <p:bgPr>
         <a:solidFill>
-          <a:srgbClr val="FFFFFF"/>
+          <a:srgbClr val="F3F4F6"/>
         </a:solidFill>
         <a:effectLst/>
       </p:bgPr>
@@ -7942,7 +7942,7 @@
     <p:bg>
       <p:bgPr>
         <a:solidFill>
-          <a:srgbClr val="FFFFFF"/>
+          <a:srgbClr val="F3F4F6"/>
         </a:solidFill>
         <a:effectLst/>
       </p:bgPr>

--- a/docs/why-rules-before-ai.pptx
+++ b/docs/why-rules-before-ai.pptx
@@ -7261,8 +7261,8 @@
         </p:nvSpPr>
         <p:spPr>
           <a:xfrm>
-            <a:off x="2743200" y="1280160"/>
-            <a:ext cx="7315200" cy="822960"/>
+            <a:off x="2468880" y="1188720"/>
+            <a:ext cx="7315200" cy="868680"/>
           </a:xfrm>
           <a:prstGeom prst="roundRect">
             <a:avLst/>
@@ -7325,8 +7325,8 @@
         </p:nvSpPr>
         <p:spPr>
           <a:xfrm>
-            <a:off x="6126480" y="2103120"/>
-            <a:ext cx="548640" cy="457200"/>
+            <a:off x="5852160" y="2057400"/>
+            <a:ext cx="548640" cy="414996"/>
           </a:xfrm>
           <a:prstGeom prst="rect">
             <a:avLst/>
@@ -7360,8 +7360,8 @@
         </p:nvSpPr>
         <p:spPr>
           <a:xfrm>
-            <a:off x="2743200" y="2697480"/>
-            <a:ext cx="7315200" cy="822960"/>
+            <a:off x="2468880" y="2472396"/>
+            <a:ext cx="7315200" cy="868680"/>
           </a:xfrm>
           <a:prstGeom prst="roundRect">
             <a:avLst/>
@@ -7424,8 +7424,8 @@
         </p:nvSpPr>
         <p:spPr>
           <a:xfrm>
-            <a:off x="6126480" y="3520440"/>
-            <a:ext cx="548640" cy="457200"/>
+            <a:off x="5852160" y="3341076"/>
+            <a:ext cx="548640" cy="414996"/>
           </a:xfrm>
           <a:prstGeom prst="rect">
             <a:avLst/>
@@ -7459,8 +7459,8 @@
         </p:nvSpPr>
         <p:spPr>
           <a:xfrm>
-            <a:off x="2743200" y="4114800"/>
-            <a:ext cx="7315200" cy="822960"/>
+            <a:off x="2468880" y="3756072"/>
+            <a:ext cx="7315200" cy="868680"/>
           </a:xfrm>
           <a:prstGeom prst="roundRect">
             <a:avLst/>
@@ -7523,8 +7523,8 @@
         </p:nvSpPr>
         <p:spPr>
           <a:xfrm>
-            <a:off x="6126480" y="4937760"/>
-            <a:ext cx="548640" cy="457200"/>
+            <a:off x="5852160" y="4624752"/>
+            <a:ext cx="548640" cy="414996"/>
           </a:xfrm>
           <a:prstGeom prst="rect">
             <a:avLst/>
@@ -7558,8 +7558,8 @@
         </p:nvSpPr>
         <p:spPr>
           <a:xfrm>
-            <a:off x="2743200" y="5532120"/>
-            <a:ext cx="7315200" cy="822960"/>
+            <a:off x="2468880" y="5039748"/>
+            <a:ext cx="7315200" cy="868680"/>
           </a:xfrm>
           <a:prstGeom prst="roundRect">
             <a:avLst/>
